--- a/paper/image/paper_image.pptx
+++ b/paper/image/paper_image.pptx
@@ -260,7 +260,7 @@
           <a:p>
             <a:fld id="{E05475DA-6F7E-4696-8C6D-CBE7B364103A}" type="datetimeFigureOut">
               <a:rPr lang="zh-CN" altLang="en-US" smtClean="0"/>
-              <a:t>2026/10/8</a:t>
+              <a:t>2026/10/9</a:t>
             </a:fld>
             <a:endParaRPr lang="zh-CN" altLang="en-US"/>
           </a:p>
@@ -458,7 +458,7 @@
           <a:p>
             <a:fld id="{E05475DA-6F7E-4696-8C6D-CBE7B364103A}" type="datetimeFigureOut">
               <a:rPr lang="zh-CN" altLang="en-US" smtClean="0"/>
-              <a:t>2026/10/8</a:t>
+              <a:t>2026/10/9</a:t>
             </a:fld>
             <a:endParaRPr lang="zh-CN" altLang="en-US"/>
           </a:p>
@@ -666,7 +666,7 @@
           <a:p>
             <a:fld id="{E05475DA-6F7E-4696-8C6D-CBE7B364103A}" type="datetimeFigureOut">
               <a:rPr lang="zh-CN" altLang="en-US" smtClean="0"/>
-              <a:t>2026/10/8</a:t>
+              <a:t>2026/10/9</a:t>
             </a:fld>
             <a:endParaRPr lang="zh-CN" altLang="en-US"/>
           </a:p>
@@ -864,7 +864,7 @@
           <a:p>
             <a:fld id="{E05475DA-6F7E-4696-8C6D-CBE7B364103A}" type="datetimeFigureOut">
               <a:rPr lang="zh-CN" altLang="en-US" smtClean="0"/>
-              <a:t>2026/10/8</a:t>
+              <a:t>2026/10/9</a:t>
             </a:fld>
             <a:endParaRPr lang="zh-CN" altLang="en-US"/>
           </a:p>
@@ -1139,7 +1139,7 @@
           <a:p>
             <a:fld id="{E05475DA-6F7E-4696-8C6D-CBE7B364103A}" type="datetimeFigureOut">
               <a:rPr lang="zh-CN" altLang="en-US" smtClean="0"/>
-              <a:t>2026/10/8</a:t>
+              <a:t>2026/10/9</a:t>
             </a:fld>
             <a:endParaRPr lang="zh-CN" altLang="en-US"/>
           </a:p>
@@ -1404,7 +1404,7 @@
           <a:p>
             <a:fld id="{E05475DA-6F7E-4696-8C6D-CBE7B364103A}" type="datetimeFigureOut">
               <a:rPr lang="zh-CN" altLang="en-US" smtClean="0"/>
-              <a:t>2026/10/8</a:t>
+              <a:t>2026/10/9</a:t>
             </a:fld>
             <a:endParaRPr lang="zh-CN" altLang="en-US"/>
           </a:p>
@@ -1816,7 +1816,7 @@
           <a:p>
             <a:fld id="{E05475DA-6F7E-4696-8C6D-CBE7B364103A}" type="datetimeFigureOut">
               <a:rPr lang="zh-CN" altLang="en-US" smtClean="0"/>
-              <a:t>2026/10/8</a:t>
+              <a:t>2026/10/9</a:t>
             </a:fld>
             <a:endParaRPr lang="zh-CN" altLang="en-US"/>
           </a:p>
@@ -1957,7 +1957,7 @@
           <a:p>
             <a:fld id="{E05475DA-6F7E-4696-8C6D-CBE7B364103A}" type="datetimeFigureOut">
               <a:rPr lang="zh-CN" altLang="en-US" smtClean="0"/>
-              <a:t>2026/10/8</a:t>
+              <a:t>2026/10/9</a:t>
             </a:fld>
             <a:endParaRPr lang="zh-CN" altLang="en-US"/>
           </a:p>
@@ -2070,7 +2070,7 @@
           <a:p>
             <a:fld id="{E05475DA-6F7E-4696-8C6D-CBE7B364103A}" type="datetimeFigureOut">
               <a:rPr lang="zh-CN" altLang="en-US" smtClean="0"/>
-              <a:t>2026/10/8</a:t>
+              <a:t>2026/10/9</a:t>
             </a:fld>
             <a:endParaRPr lang="zh-CN" altLang="en-US"/>
           </a:p>
@@ -2381,7 +2381,7 @@
           <a:p>
             <a:fld id="{E05475DA-6F7E-4696-8C6D-CBE7B364103A}" type="datetimeFigureOut">
               <a:rPr lang="zh-CN" altLang="en-US" smtClean="0"/>
-              <a:t>2026/10/8</a:t>
+              <a:t>2026/10/9</a:t>
             </a:fld>
             <a:endParaRPr lang="zh-CN" altLang="en-US"/>
           </a:p>
@@ -2669,7 +2669,7 @@
           <a:p>
             <a:fld id="{E05475DA-6F7E-4696-8C6D-CBE7B364103A}" type="datetimeFigureOut">
               <a:rPr lang="zh-CN" altLang="en-US" smtClean="0"/>
-              <a:t>2026/10/8</a:t>
+              <a:t>2026/10/9</a:t>
             </a:fld>
             <a:endParaRPr lang="zh-CN" altLang="en-US"/>
           </a:p>
@@ -2910,7 +2910,7 @@
           <a:p>
             <a:fld id="{E05475DA-6F7E-4696-8C6D-CBE7B364103A}" type="datetimeFigureOut">
               <a:rPr lang="zh-CN" altLang="en-US" smtClean="0"/>
-              <a:t>2026/10/8</a:t>
+              <a:t>2026/10/9</a:t>
             </a:fld>
             <a:endParaRPr lang="zh-CN" altLang="en-US"/>
           </a:p>
@@ -3582,13 +3582,13 @@
             <p:nvPr/>
           </p:nvPicPr>
           <p:blipFill>
-            <a:blip r:embed="rId2" cstate="print">
+            <a:blip cstate="print">
               <a:extLst>
                 <a:ext uri="{28A0092B-C50C-407E-A947-70E740481C1C}">
                   <a14:useLocalDpi xmlns:a14="http://schemas.microsoft.com/office/drawing/2010/main" val="0"/>
                 </a:ext>
                 <a:ext uri="{96DAC541-7B7A-43D3-8B79-37D633B846F1}">
-                  <asvg:svgBlip xmlns:asvg="http://schemas.microsoft.com/office/drawing/2016/SVG/main" r:embed="rId3"/>
+                  <asvg:svgBlip xmlns:asvg="http://schemas.microsoft.com/office/drawing/2016/SVG/main" r:embed="rId2"/>
                 </a:ext>
               </a:extLst>
             </a:blip>
@@ -3621,13 +3621,13 @@
             <p:nvPr/>
           </p:nvPicPr>
           <p:blipFill>
-            <a:blip r:embed="rId2" cstate="print">
+            <a:blip cstate="print">
               <a:extLst>
                 <a:ext uri="{28A0092B-C50C-407E-A947-70E740481C1C}">
                   <a14:useLocalDpi xmlns:a14="http://schemas.microsoft.com/office/drawing/2010/main" val="0"/>
                 </a:ext>
                 <a:ext uri="{96DAC541-7B7A-43D3-8B79-37D633B846F1}">
-                  <asvg:svgBlip xmlns:asvg="http://schemas.microsoft.com/office/drawing/2016/SVG/main" r:embed="rId3"/>
+                  <asvg:svgBlip xmlns:asvg="http://schemas.microsoft.com/office/drawing/2016/SVG/main" r:embed="rId2"/>
                 </a:ext>
               </a:extLst>
             </a:blip>
@@ -3660,13 +3660,13 @@
             <p:nvPr/>
           </p:nvPicPr>
           <p:blipFill>
-            <a:blip r:embed="rId2" cstate="print">
+            <a:blip cstate="print">
               <a:extLst>
                 <a:ext uri="{28A0092B-C50C-407E-A947-70E740481C1C}">
                   <a14:useLocalDpi xmlns:a14="http://schemas.microsoft.com/office/drawing/2010/main" val="0"/>
                 </a:ext>
                 <a:ext uri="{96DAC541-7B7A-43D3-8B79-37D633B846F1}">
-                  <asvg:svgBlip xmlns:asvg="http://schemas.microsoft.com/office/drawing/2016/SVG/main" r:embed="rId3"/>
+                  <asvg:svgBlip xmlns:asvg="http://schemas.microsoft.com/office/drawing/2016/SVG/main" r:embed="rId2"/>
                 </a:ext>
               </a:extLst>
             </a:blip>
@@ -6365,13 +6365,13 @@
           <p:nvPr/>
         </p:nvPicPr>
         <p:blipFill>
-          <a:blip r:embed="rId2" cstate="print">
+          <a:blip cstate="print">
             <a:extLst>
               <a:ext uri="{28A0092B-C50C-407E-A947-70E740481C1C}">
                 <a14:useLocalDpi xmlns:a14="http://schemas.microsoft.com/office/drawing/2010/main" val="0"/>
               </a:ext>
               <a:ext uri="{96DAC541-7B7A-43D3-8B79-37D633B846F1}">
-                <asvg:svgBlip xmlns:asvg="http://schemas.microsoft.com/office/drawing/2016/SVG/main" r:embed="rId3"/>
+                <asvg:svgBlip xmlns:asvg="http://schemas.microsoft.com/office/drawing/2016/SVG/main" r:embed="rId2"/>
               </a:ext>
             </a:extLst>
           </a:blip>
@@ -6441,7 +6441,7 @@
         </p:nvSpPr>
         <p:spPr>
           <a:xfrm>
-            <a:off x="4462984" y="1820054"/>
+            <a:off x="4134278" y="1819816"/>
             <a:ext cx="1633016" cy="307777"/>
           </a:xfrm>
           <a:prstGeom prst="rect">
@@ -6813,8 +6813,8 @@
         </p:nvSpPr>
         <p:spPr>
           <a:xfrm>
-            <a:off x="2539198" y="4918155"/>
-            <a:ext cx="1208696" cy="354656"/>
+            <a:off x="2539198" y="4855621"/>
+            <a:ext cx="1208696" cy="417190"/>
           </a:xfrm>
           <a:prstGeom prst="roundRect">
             <a:avLst/>
@@ -6863,7 +6863,7 @@
         </p:nvSpPr>
         <p:spPr>
           <a:xfrm>
-            <a:off x="2559905" y="5619240"/>
+            <a:off x="2546614" y="5620848"/>
             <a:ext cx="1185581" cy="335546"/>
           </a:xfrm>
           <a:prstGeom prst="roundRect">
@@ -6921,12 +6921,12 @@
         </p:nvCxnSpPr>
         <p:spPr>
           <a:xfrm rot="10800000" flipH="1">
-            <a:off x="2559904" y="4281749"/>
-            <a:ext cx="58865" cy="1505265"/>
+            <a:off x="2546614" y="4281749"/>
+            <a:ext cx="72156" cy="1506873"/>
           </a:xfrm>
           <a:prstGeom prst="bentConnector3">
             <a:avLst>
-              <a:gd name="adj1" fmla="val -388346"/>
+              <a:gd name="adj1" fmla="val -316814"/>
             </a:avLst>
           </a:prstGeom>
           <a:ln>
@@ -6967,7 +6967,7 @@
         <p:spPr>
           <a:xfrm>
             <a:off x="3143546" y="4486229"/>
-            <a:ext cx="0" cy="431926"/>
+            <a:ext cx="0" cy="369392"/>
           </a:xfrm>
           <a:prstGeom prst="straightConnector1">
             <a:avLst/>
@@ -7008,9 +7008,9 @@
           <p:nvPr/>
         </p:nvCxnSpPr>
         <p:spPr>
-          <a:xfrm>
-            <a:off x="3143546" y="5272811"/>
-            <a:ext cx="9150" cy="346429"/>
+          <a:xfrm flipH="1">
+            <a:off x="3139405" y="5272811"/>
+            <a:ext cx="4141" cy="348037"/>
           </a:xfrm>
           <a:prstGeom prst="straightConnector1">
             <a:avLst/>
@@ -7049,10 +7049,10 @@
           <p:nvPr/>
         </p:nvPicPr>
         <p:blipFill>
-          <a:blip r:embed="rId2">
+          <a:blip>
             <a:extLst>
               <a:ext uri="{96DAC541-7B7A-43D3-8B79-37D633B846F1}">
-                <asvg:svgBlip xmlns:asvg="http://schemas.microsoft.com/office/drawing/2016/SVG/main" r:embed="rId3"/>
+                <asvg:svgBlip xmlns:asvg="http://schemas.microsoft.com/office/drawing/2016/SVG/main" r:embed="rId2"/>
               </a:ext>
             </a:extLst>
           </a:blip>
@@ -7241,10 +7241,10 @@
             <p:nvPr/>
           </p:nvPicPr>
           <p:blipFill>
-            <a:blip r:embed="rId4">
+            <a:blip>
               <a:extLst>
                 <a:ext uri="{96DAC541-7B7A-43D3-8B79-37D633B846F1}">
-                  <asvg:svgBlip xmlns:asvg="http://schemas.microsoft.com/office/drawing/2016/SVG/main" r:embed="rId5"/>
+                  <asvg:svgBlip xmlns:asvg="http://schemas.microsoft.com/office/drawing/2016/SVG/main" r:embed="rId3"/>
                 </a:ext>
               </a:extLst>
             </a:blip>
@@ -7277,10 +7277,10 @@
             <p:nvPr/>
           </p:nvPicPr>
           <p:blipFill>
-            <a:blip r:embed="rId4">
+            <a:blip>
               <a:extLst>
                 <a:ext uri="{96DAC541-7B7A-43D3-8B79-37D633B846F1}">
-                  <asvg:svgBlip xmlns:asvg="http://schemas.microsoft.com/office/drawing/2016/SVG/main" r:embed="rId5"/>
+                  <asvg:svgBlip xmlns:asvg="http://schemas.microsoft.com/office/drawing/2016/SVG/main" r:embed="rId3"/>
                 </a:ext>
               </a:extLst>
             </a:blip>
@@ -7313,10 +7313,10 @@
             <p:nvPr/>
           </p:nvPicPr>
           <p:blipFill>
-            <a:blip r:embed="rId4">
+            <a:blip>
               <a:extLst>
                 <a:ext uri="{96DAC541-7B7A-43D3-8B79-37D633B846F1}">
-                  <asvg:svgBlip xmlns:asvg="http://schemas.microsoft.com/office/drawing/2016/SVG/main" r:embed="rId5"/>
+                  <asvg:svgBlip xmlns:asvg="http://schemas.microsoft.com/office/drawing/2016/SVG/main" r:embed="rId3"/>
                 </a:ext>
               </a:extLst>
             </a:blip>
@@ -7392,8 +7392,8 @@
         </p:nvSpPr>
         <p:spPr>
           <a:xfrm>
-            <a:off x="5388433" y="4918155"/>
-            <a:ext cx="1208696" cy="354656"/>
+            <a:off x="5388433" y="4870704"/>
+            <a:ext cx="1208696" cy="402107"/>
           </a:xfrm>
           <a:prstGeom prst="roundRect">
             <a:avLst/>
@@ -7446,8 +7446,8 @@
         </p:nvCxnSpPr>
         <p:spPr>
           <a:xfrm>
-            <a:off x="3747894" y="5095483"/>
-            <a:ext cx="1640539" cy="0"/>
+            <a:off x="3747894" y="5064216"/>
+            <a:ext cx="1640539" cy="7542"/>
           </a:xfrm>
           <a:prstGeom prst="straightConnector1">
             <a:avLst/>
@@ -7800,9 +7800,9 @@
           <p:nvPr/>
         </p:nvCxnSpPr>
         <p:spPr>
-          <a:xfrm flipH="1" flipV="1">
-            <a:off x="3745486" y="5787013"/>
-            <a:ext cx="893231" cy="1608"/>
+          <a:xfrm flipH="1">
+            <a:off x="3732195" y="5788621"/>
+            <a:ext cx="906522" cy="0"/>
           </a:xfrm>
           <a:prstGeom prst="straightConnector1">
             <a:avLst/>
@@ -8180,56 +8180,6 @@
           </a:p>
         </p:txBody>
       </p:sp>
-      <p:sp>
-        <p:nvSpPr>
-          <p:cNvPr id="286" name="矩形: 圆角 285">
-            <a:extLst>
-              <a:ext uri="{FF2B5EF4-FFF2-40B4-BE49-F238E27FC236}">
-                <a16:creationId xmlns:a16="http://schemas.microsoft.com/office/drawing/2014/main" id="{68EA4F41-6690-1030-42F7-0FBEE1C8B308}"/>
-              </a:ext>
-            </a:extLst>
-          </p:cNvPr>
-          <p:cNvSpPr/>
-          <p:nvPr/>
-        </p:nvSpPr>
-        <p:spPr>
-          <a:xfrm>
-            <a:off x="7738334" y="2615145"/>
-            <a:ext cx="1208696" cy="335546"/>
-          </a:xfrm>
-          <a:prstGeom prst="roundRect">
-            <a:avLst/>
-          </a:prstGeom>
-        </p:spPr>
-        <p:style>
-          <a:lnRef idx="2">
-            <a:schemeClr val="dk1"/>
-          </a:lnRef>
-          <a:fillRef idx="1">
-            <a:schemeClr val="lt1"/>
-          </a:fillRef>
-          <a:effectRef idx="0">
-            <a:schemeClr val="dk1"/>
-          </a:effectRef>
-          <a:fontRef idx="minor">
-            <a:schemeClr val="dk1"/>
-          </a:fontRef>
-        </p:style>
-        <p:txBody>
-          <a:bodyPr rtlCol="0" anchor="ctr"/>
-          <a:lstStyle/>
-          <a:p>
-            <a:pPr algn="ctr"/>
-            <a:r>
-              <a:rPr lang="en-US" altLang="zh-CN" sz="1200" dirty="0">
-                <a:latin typeface="Times New Roman" panose="02020603050405020304" pitchFamily="18" charset="0"/>
-                <a:cs typeface="Times New Roman" panose="02020603050405020304" pitchFamily="18" charset="0"/>
-              </a:rPr>
-              <a:t>Event</a:t>
-            </a:r>
-          </a:p>
-        </p:txBody>
-      </p:sp>
       <p:cxnSp>
         <p:nvCxnSpPr>
           <p:cNvPr id="287" name="直接箭头连接符 93">
@@ -8246,8 +8196,8 @@
         </p:nvCxnSpPr>
         <p:spPr>
           <a:xfrm>
-            <a:off x="6988019" y="2782918"/>
-            <a:ext cx="701418" cy="0"/>
+            <a:off x="7036916" y="2775459"/>
+            <a:ext cx="652521" cy="7459"/>
           </a:xfrm>
           <a:prstGeom prst="straightConnector1">
             <a:avLst/>
@@ -8282,15 +8232,14 @@
           </p:cNvPr>
           <p:cNvCxnSpPr>
             <a:cxnSpLocks/>
-            <a:stCxn id="286" idx="2"/>
             <a:endCxn id="214" idx="0"/>
           </p:cNvCxnSpPr>
           <p:nvPr/>
         </p:nvCxnSpPr>
         <p:spPr>
-          <a:xfrm flipH="1">
-            <a:off x="8341806" y="2950691"/>
-            <a:ext cx="876" cy="1198875"/>
+          <a:xfrm>
+            <a:off x="8341806" y="3424266"/>
+            <a:ext cx="0" cy="725300"/>
           </a:xfrm>
           <a:prstGeom prst="straightConnector1">
             <a:avLst/>
@@ -8411,10 +8360,10 @@
           <p:nvPr/>
         </p:nvPicPr>
         <p:blipFill>
-          <a:blip r:embed="rId6">
+          <a:blip>
             <a:extLst>
               <a:ext uri="{96DAC541-7B7A-43D3-8B79-37D633B846F1}">
-                <asvg:svgBlip xmlns:asvg="http://schemas.microsoft.com/office/drawing/2016/SVG/main" r:embed="rId7"/>
+                <asvg:svgBlip xmlns:asvg="http://schemas.microsoft.com/office/drawing/2016/SVG/main" r:embed="rId4"/>
               </a:ext>
             </a:extLst>
           </a:blip>
@@ -8447,10 +8396,10 @@
           <p:nvPr/>
         </p:nvPicPr>
         <p:blipFill>
-          <a:blip r:embed="rId8">
+          <a:blip>
             <a:extLst>
               <a:ext uri="{96DAC541-7B7A-43D3-8B79-37D633B846F1}">
-                <asvg:svgBlip xmlns:asvg="http://schemas.microsoft.com/office/drawing/2016/SVG/main" r:embed="rId9"/>
+                <asvg:svgBlip xmlns:asvg="http://schemas.microsoft.com/office/drawing/2016/SVG/main" r:embed="rId5"/>
               </a:ext>
             </a:extLst>
           </a:blip>
@@ -8576,10 +8525,10 @@
           <p:nvPr/>
         </p:nvPicPr>
         <p:blipFill>
-          <a:blip r:embed="rId10">
+          <a:blip>
             <a:extLst>
               <a:ext uri="{96DAC541-7B7A-43D3-8B79-37D633B846F1}">
-                <asvg:svgBlip xmlns:asvg="http://schemas.microsoft.com/office/drawing/2016/SVG/main" r:embed="rId11"/>
+                <asvg:svgBlip xmlns:asvg="http://schemas.microsoft.com/office/drawing/2016/SVG/main" r:embed="rId6"/>
               </a:ext>
             </a:extLst>
           </a:blip>
@@ -8894,7 +8843,7 @@
         </p:nvSpPr>
         <p:spPr>
           <a:xfrm>
-            <a:off x="2559905" y="3147267"/>
+            <a:off x="2575145" y="3111707"/>
             <a:ext cx="1172290" cy="276999"/>
           </a:xfrm>
           <a:prstGeom prst="rect">
@@ -8930,15 +8879,14 @@
           </p:cNvPr>
           <p:cNvCxnSpPr>
             <a:cxnSpLocks/>
-            <a:stCxn id="388" idx="2"/>
             <a:endCxn id="68" idx="0"/>
           </p:cNvCxnSpPr>
           <p:nvPr/>
         </p:nvCxnSpPr>
         <p:spPr>
-          <a:xfrm flipH="1">
-            <a:off x="3143546" y="3424266"/>
-            <a:ext cx="2504" cy="653000"/>
+          <a:xfrm>
+            <a:off x="3143546" y="3455645"/>
+            <a:ext cx="0" cy="621621"/>
           </a:xfrm>
           <a:prstGeom prst="straightConnector1">
             <a:avLst/>
@@ -9015,7 +8963,7 @@
           <p:nvPr/>
         </p:nvPicPr>
         <p:blipFill>
-          <a:blip r:embed="rId12">
+          <a:blip r:embed="rId7">
             <a:extLst>
               <a:ext uri="{28A0092B-C50C-407E-A947-70E740481C1C}">
                 <a14:useLocalDpi xmlns:a14="http://schemas.microsoft.com/office/drawing/2010/main" val="0"/>
@@ -9028,7 +8976,7 @@
         </p:blipFill>
         <p:spPr>
           <a:xfrm>
-            <a:off x="2724655" y="2377950"/>
+            <a:off x="2749317" y="2334810"/>
             <a:ext cx="880390" cy="880390"/>
           </a:xfrm>
           <a:prstGeom prst="rect">
@@ -9077,6 +9025,85 @@
           </a:fontRef>
         </p:style>
       </p:cxnSp>
+      <p:pic>
+        <p:nvPicPr>
+          <p:cNvPr id="15" name="图形 14">
+            <a:extLst>
+              <a:ext uri="{FF2B5EF4-FFF2-40B4-BE49-F238E27FC236}">
+                <a16:creationId xmlns:a16="http://schemas.microsoft.com/office/drawing/2014/main" id="{0752A27A-E2C2-9A09-32AF-381295AA2EE8}"/>
+              </a:ext>
+            </a:extLst>
+          </p:cNvPr>
+          <p:cNvPicPr>
+            <a:picLocks noChangeAspect="1"/>
+          </p:cNvPicPr>
+          <p:nvPr/>
+        </p:nvPicPr>
+        <p:blipFill>
+          <a:blip>
+            <a:extLst>
+              <a:ext uri="{96DAC541-7B7A-43D3-8B79-37D633B846F1}">
+                <asvg:svgBlip xmlns:asvg="http://schemas.microsoft.com/office/drawing/2016/SVG/main" r:embed="rId8"/>
+              </a:ext>
+            </a:extLst>
+          </a:blip>
+          <a:stretch>
+            <a:fillRect/>
+          </a:stretch>
+        </p:blipFill>
+        <p:spPr>
+          <a:xfrm>
+            <a:off x="7849345" y="2337498"/>
+            <a:ext cx="935681" cy="935681"/>
+          </a:xfrm>
+          <a:prstGeom prst="rect">
+            <a:avLst/>
+          </a:prstGeom>
+        </p:spPr>
+      </p:pic>
+      <p:sp>
+        <p:nvSpPr>
+          <p:cNvPr id="18" name="文本框 17">
+            <a:extLst>
+              <a:ext uri="{FF2B5EF4-FFF2-40B4-BE49-F238E27FC236}">
+                <a16:creationId xmlns:a16="http://schemas.microsoft.com/office/drawing/2014/main" id="{DEE8174F-8910-6BA4-AE80-118F8981D007}"/>
+              </a:ext>
+            </a:extLst>
+          </p:cNvPr>
+          <p:cNvSpPr txBox="1"/>
+          <p:nvPr/>
+        </p:nvSpPr>
+        <p:spPr>
+          <a:xfrm>
+            <a:off x="7754487" y="3151326"/>
+            <a:ext cx="1172290" cy="276999"/>
+          </a:xfrm>
+          <a:prstGeom prst="rect">
+            <a:avLst/>
+          </a:prstGeom>
+          <a:noFill/>
+        </p:spPr>
+        <p:txBody>
+          <a:bodyPr wrap="square" rtlCol="0">
+            <a:spAutoFit/>
+          </a:bodyPr>
+          <a:lstStyle/>
+          <a:p>
+            <a:pPr algn="ctr"/>
+            <a:r>
+              <a:rPr lang="en-US" altLang="zh-CN" sz="1200">
+                <a:latin typeface="Times New Roman" panose="02020603050405020304" pitchFamily="18" charset="0"/>
+                <a:cs typeface="Times New Roman" panose="02020603050405020304" pitchFamily="18" charset="0"/>
+              </a:rPr>
+              <a:t>Event</a:t>
+            </a:r>
+            <a:endParaRPr lang="en-US" altLang="zh-CN" sz="1200" dirty="0">
+              <a:latin typeface="Times New Roman" panose="02020603050405020304" pitchFamily="18" charset="0"/>
+              <a:cs typeface="Times New Roman" panose="02020603050405020304" pitchFamily="18" charset="0"/>
+            </a:endParaRPr>
+          </a:p>
+        </p:txBody>
+      </p:sp>
     </p:spTree>
     <p:extLst>
       <p:ext uri="{BB962C8B-B14F-4D97-AF65-F5344CB8AC3E}">
